--- a/Model transitions.pptx
+++ b/Model transitions.pptx
@@ -109,6 +109,11 @@
       </a:defRPr>
     </a:lvl9pPr>
   </p:defaultTextStyle>
+  <p:extLst>
+    <p:ext uri="{EFAFB233-063F-42B5-8137-9DF3F51BA10A}">
+      <p15:sldGuideLst xmlns:p15="http://schemas.microsoft.com/office/powerpoint/2012/main"/>
+    </p:ext>
+  </p:extLst>
 </p:presentation>
 </file>
 
@@ -194,7 +199,7 @@
           <a:p>
             <a:fld id="{77A3C82F-5521-4E6C-AB8D-E13B0F6767E4}" type="datetimeFigureOut">
               <a:rPr lang="en-US" smtClean="0"/>
-              <a:t>10/11/2024</a:t>
+              <a:t>10/17/2024</a:t>
             </a:fld>
             <a:endParaRPr lang="en-US"/>
           </a:p>
@@ -505,46 +510,7 @@
           <a:bodyPr/>
           <a:lstStyle/>
           <a:p>
-            <a:r>
-              <a:rPr lang="en-US" dirty="0"/>
-              <a:t>dS &lt;- -beta * S * I/N - mu * S + N * mu + phi*R + epsilon *Q    </a:t>
-            </a:r>
-          </a:p>
-          <a:p>
-            <a:r>
-              <a:rPr lang="en-US" dirty="0"/>
-              <a:t>dE &lt;- beta * S * I/N - gamma*E - rho*E - mu *E    </a:t>
-            </a:r>
-          </a:p>
-          <a:p>
-            <a:r>
-              <a:rPr lang="en-US" dirty="0"/>
-              <a:t>dQ &lt;- rho*E - kappa*Q - mu *Q - epsilon *Q    </a:t>
-            </a:r>
-          </a:p>
-          <a:p>
-            <a:r>
-              <a:rPr lang="en-US" dirty="0"/>
-              <a:t>dI &lt;- gamma*E - delta_I * I - tau_I*I + kappa*Q - alpha*I - mu *I    </a:t>
-            </a:r>
-          </a:p>
-          <a:p>
-            <a:r>
-              <a:rPr lang="en-US" dirty="0"/>
-              <a:t>dIs &lt;- alpha*I - delta_Is * Is - tau_Is*Is - - mu *Is   </a:t>
-            </a:r>
-          </a:p>
-          <a:p>
-            <a:r>
-              <a:rPr lang="en-US" dirty="0"/>
-              <a:t>dR &lt;- delta_I * I  + delta_Is * Is - mu *R - phi*R    </a:t>
-            </a:r>
-          </a:p>
-          <a:p>
-            <a:r>
-              <a:rPr lang="en-US" dirty="0"/>
-              <a:t>dD &lt;- tau_I*I + tau_Is*Is</a:t>
-            </a:r>
+            <a:endParaRPr lang="en-US" dirty="0"/>
           </a:p>
         </p:txBody>
       </p:sp>
@@ -659,46 +625,7 @@
           <a:bodyPr/>
           <a:lstStyle/>
           <a:p>
-            <a:r>
-              <a:rPr lang="en-US" dirty="0"/>
-              <a:t>dS &lt;- -beta * S * I/N - mu * S + N * mu + phi*R + epsilon *Q    </a:t>
-            </a:r>
-          </a:p>
-          <a:p>
-            <a:r>
-              <a:rPr lang="en-US" dirty="0"/>
-              <a:t>dE &lt;- beta * S * I/N - gamma*E - rho*E - mu *E    </a:t>
-            </a:r>
-          </a:p>
-          <a:p>
-            <a:r>
-              <a:rPr lang="en-US" dirty="0"/>
-              <a:t>dQ &lt;- rho*E - kappa*Q - mu *Q - epsilon *Q    </a:t>
-            </a:r>
-          </a:p>
-          <a:p>
-            <a:r>
-              <a:rPr lang="en-US" dirty="0"/>
-              <a:t>dI &lt;- gamma*E - delta_I * I - tau_I*I + kappa*Q - alpha*I - mu *I    </a:t>
-            </a:r>
-          </a:p>
-          <a:p>
-            <a:r>
-              <a:rPr lang="en-US" dirty="0"/>
-              <a:t>dIs &lt;- alpha*I - delta_Is * Is - tau_Is*Is - - mu *Is   </a:t>
-            </a:r>
-          </a:p>
-          <a:p>
-            <a:r>
-              <a:rPr lang="en-US" dirty="0"/>
-              <a:t>dR &lt;- delta_I * I  + delta_Is * Is - mu *R - phi*R    </a:t>
-            </a:r>
-          </a:p>
-          <a:p>
-            <a:r>
-              <a:rPr lang="en-US" dirty="0"/>
-              <a:t>dD &lt;- tau_I*I + tau_Is*Is</a:t>
-            </a:r>
+            <a:endParaRPr lang="en-US" dirty="0"/>
           </a:p>
         </p:txBody>
       </p:sp>
@@ -916,7 +843,7 @@
           <a:p>
             <a:fld id="{CFB326CB-CCAA-4DCE-95F1-90AB00911D92}" type="datetimeFigureOut">
               <a:rPr lang="en-US" smtClean="0"/>
-              <a:t>10/11/2024</a:t>
+              <a:t>10/17/2024</a:t>
             </a:fld>
             <a:endParaRPr lang="en-US"/>
           </a:p>
@@ -1114,7 +1041,7 @@
           <a:p>
             <a:fld id="{CFB326CB-CCAA-4DCE-95F1-90AB00911D92}" type="datetimeFigureOut">
               <a:rPr lang="en-US" smtClean="0"/>
-              <a:t>10/11/2024</a:t>
+              <a:t>10/17/2024</a:t>
             </a:fld>
             <a:endParaRPr lang="en-US"/>
           </a:p>
@@ -1322,7 +1249,7 @@
           <a:p>
             <a:fld id="{CFB326CB-CCAA-4DCE-95F1-90AB00911D92}" type="datetimeFigureOut">
               <a:rPr lang="en-US" smtClean="0"/>
-              <a:t>10/11/2024</a:t>
+              <a:t>10/17/2024</a:t>
             </a:fld>
             <a:endParaRPr lang="en-US"/>
           </a:p>
@@ -1520,7 +1447,7 @@
           <a:p>
             <a:fld id="{CFB326CB-CCAA-4DCE-95F1-90AB00911D92}" type="datetimeFigureOut">
               <a:rPr lang="en-US" smtClean="0"/>
-              <a:t>10/11/2024</a:t>
+              <a:t>10/17/2024</a:t>
             </a:fld>
             <a:endParaRPr lang="en-US"/>
           </a:p>
@@ -1795,7 +1722,7 @@
           <a:p>
             <a:fld id="{CFB326CB-CCAA-4DCE-95F1-90AB00911D92}" type="datetimeFigureOut">
               <a:rPr lang="en-US" smtClean="0"/>
-              <a:t>10/11/2024</a:t>
+              <a:t>10/17/2024</a:t>
             </a:fld>
             <a:endParaRPr lang="en-US"/>
           </a:p>
@@ -2060,7 +1987,7 @@
           <a:p>
             <a:fld id="{CFB326CB-CCAA-4DCE-95F1-90AB00911D92}" type="datetimeFigureOut">
               <a:rPr lang="en-US" smtClean="0"/>
-              <a:t>10/11/2024</a:t>
+              <a:t>10/17/2024</a:t>
             </a:fld>
             <a:endParaRPr lang="en-US"/>
           </a:p>
@@ -2472,7 +2399,7 @@
           <a:p>
             <a:fld id="{CFB326CB-CCAA-4DCE-95F1-90AB00911D92}" type="datetimeFigureOut">
               <a:rPr lang="en-US" smtClean="0"/>
-              <a:t>10/11/2024</a:t>
+              <a:t>10/17/2024</a:t>
             </a:fld>
             <a:endParaRPr lang="en-US"/>
           </a:p>
@@ -2613,7 +2540,7 @@
           <a:p>
             <a:fld id="{CFB326CB-CCAA-4DCE-95F1-90AB00911D92}" type="datetimeFigureOut">
               <a:rPr lang="en-US" smtClean="0"/>
-              <a:t>10/11/2024</a:t>
+              <a:t>10/17/2024</a:t>
             </a:fld>
             <a:endParaRPr lang="en-US"/>
           </a:p>
@@ -2726,7 +2653,7 @@
           <a:p>
             <a:fld id="{CFB326CB-CCAA-4DCE-95F1-90AB00911D92}" type="datetimeFigureOut">
               <a:rPr lang="en-US" smtClean="0"/>
-              <a:t>10/11/2024</a:t>
+              <a:t>10/17/2024</a:t>
             </a:fld>
             <a:endParaRPr lang="en-US"/>
           </a:p>
@@ -3037,7 +2964,7 @@
           <a:p>
             <a:fld id="{CFB326CB-CCAA-4DCE-95F1-90AB00911D92}" type="datetimeFigureOut">
               <a:rPr lang="en-US" smtClean="0"/>
-              <a:t>10/11/2024</a:t>
+              <a:t>10/17/2024</a:t>
             </a:fld>
             <a:endParaRPr lang="en-US"/>
           </a:p>
@@ -3325,7 +3252,7 @@
           <a:p>
             <a:fld id="{CFB326CB-CCAA-4DCE-95F1-90AB00911D92}" type="datetimeFigureOut">
               <a:rPr lang="en-US" smtClean="0"/>
-              <a:t>10/11/2024</a:t>
+              <a:t>10/17/2024</a:t>
             </a:fld>
             <a:endParaRPr lang="en-US"/>
           </a:p>
@@ -3566,7 +3493,7 @@
           <a:p>
             <a:fld id="{CFB326CB-CCAA-4DCE-95F1-90AB00911D92}" type="datetimeFigureOut">
               <a:rPr lang="en-US" smtClean="0"/>
-              <a:t>10/11/2024</a:t>
+              <a:t>10/17/2024</a:t>
             </a:fld>
             <a:endParaRPr lang="en-US"/>
           </a:p>
@@ -5290,7 +5217,7 @@
         <p:spPr>
           <a:xfrm>
             <a:off x="3500905" y="2463254"/>
-            <a:ext cx="697627" cy="246221"/>
+            <a:ext cx="737720" cy="246221"/>
           </a:xfrm>
           <a:prstGeom prst="rect">
             <a:avLst/>
@@ -5413,6 +5340,291 @@
               <a:rPr lang="en-US" sz="3500" b="1" u="sng" dirty="0"/>
               <a:t>CHILDREN POPULATION</a:t>
             </a:r>
+          </a:p>
+        </p:txBody>
+      </p:sp>
+      <p:sp>
+        <p:nvSpPr>
+          <p:cNvPr id="2" name="Rectangle 1">
+            <a:extLst>
+              <a:ext uri="{FF2B5EF4-FFF2-40B4-BE49-F238E27FC236}">
+                <a16:creationId xmlns:a16="http://schemas.microsoft.com/office/drawing/2014/main" id="{63EBA377-61F1-42DE-9618-E1E5FF4B240A}"/>
+              </a:ext>
+            </a:extLst>
+          </p:cNvPr>
+          <p:cNvSpPr/>
+          <p:nvPr/>
+        </p:nvSpPr>
+        <p:spPr>
+          <a:xfrm>
+            <a:off x="5550688" y="2043831"/>
+            <a:ext cx="579005" cy="246221"/>
+          </a:xfrm>
+          <a:prstGeom prst="rect">
+            <a:avLst/>
+          </a:prstGeom>
+        </p:spPr>
+        <p:txBody>
+          <a:bodyPr wrap="square">
+            <a:spAutoFit/>
+          </a:bodyPr>
+          <a:lstStyle/>
+          <a:p>
+            <a:r>
+              <a:rPr lang="en-US" sz="1000" dirty="0" err="1"/>
+              <a:t>rho_c_I</a:t>
+            </a:r>
+            <a:endParaRPr lang="en-US" sz="1000" dirty="0"/>
+          </a:p>
+        </p:txBody>
+      </p:sp>
+      <p:sp>
+        <p:nvSpPr>
+          <p:cNvPr id="36" name="Rectangle 35">
+            <a:extLst>
+              <a:ext uri="{FF2B5EF4-FFF2-40B4-BE49-F238E27FC236}">
+                <a16:creationId xmlns:a16="http://schemas.microsoft.com/office/drawing/2014/main" id="{53525F25-94B7-4DC7-83FD-DC93D7103116}"/>
+              </a:ext>
+            </a:extLst>
+          </p:cNvPr>
+          <p:cNvSpPr/>
+          <p:nvPr/>
+        </p:nvSpPr>
+        <p:spPr>
+          <a:xfrm>
+            <a:off x="5840191" y="4140718"/>
+            <a:ext cx="579005" cy="246221"/>
+          </a:xfrm>
+          <a:prstGeom prst="rect">
+            <a:avLst/>
+          </a:prstGeom>
+        </p:spPr>
+        <p:txBody>
+          <a:bodyPr wrap="square">
+            <a:spAutoFit/>
+          </a:bodyPr>
+          <a:lstStyle/>
+          <a:p>
+            <a:r>
+              <a:rPr lang="en-US" sz="1000" dirty="0" err="1"/>
+              <a:t>rho_c_I</a:t>
+            </a:r>
+            <a:endParaRPr lang="en-US" sz="1000" dirty="0"/>
+          </a:p>
+        </p:txBody>
+      </p:sp>
+      <p:sp>
+        <p:nvSpPr>
+          <p:cNvPr id="4" name="Rectangle 3">
+            <a:extLst>
+              <a:ext uri="{FF2B5EF4-FFF2-40B4-BE49-F238E27FC236}">
+                <a16:creationId xmlns:a16="http://schemas.microsoft.com/office/drawing/2014/main" id="{7F9DCA9E-5E1A-4D7D-8661-7FA4F14B97E9}"/>
+              </a:ext>
+            </a:extLst>
+          </p:cNvPr>
+          <p:cNvSpPr/>
+          <p:nvPr/>
+        </p:nvSpPr>
+        <p:spPr>
+          <a:xfrm>
+            <a:off x="7150772" y="4615143"/>
+            <a:ext cx="646331" cy="246221"/>
+          </a:xfrm>
+          <a:prstGeom prst="rect">
+            <a:avLst/>
+          </a:prstGeom>
+        </p:spPr>
+        <p:txBody>
+          <a:bodyPr wrap="none">
+            <a:spAutoFit/>
+          </a:bodyPr>
+          <a:lstStyle/>
+          <a:p>
+            <a:r>
+              <a:rPr lang="en-US" sz="1000" dirty="0" err="1"/>
+              <a:t>rho_c_Id</a:t>
+            </a:r>
+            <a:endParaRPr lang="en-US" sz="1000" dirty="0"/>
+          </a:p>
+        </p:txBody>
+      </p:sp>
+      <p:sp>
+        <p:nvSpPr>
+          <p:cNvPr id="5" name="TextBox 4">
+            <a:extLst>
+              <a:ext uri="{FF2B5EF4-FFF2-40B4-BE49-F238E27FC236}">
+                <a16:creationId xmlns:a16="http://schemas.microsoft.com/office/drawing/2014/main" id="{E854C091-AC06-4D03-8F0A-6785B9D40A86}"/>
+              </a:ext>
+            </a:extLst>
+          </p:cNvPr>
+          <p:cNvSpPr txBox="1"/>
+          <p:nvPr/>
+        </p:nvSpPr>
+        <p:spPr>
+          <a:xfrm>
+            <a:off x="9005207" y="130629"/>
+            <a:ext cx="3037114" cy="5355312"/>
+          </a:xfrm>
+          <a:prstGeom prst="rect">
+            <a:avLst/>
+          </a:prstGeom>
+          <a:noFill/>
+        </p:spPr>
+        <p:txBody>
+          <a:bodyPr wrap="square" rtlCol="0">
+            <a:spAutoFit/>
+          </a:bodyPr>
+          <a:lstStyle/>
+          <a:p>
+            <a:pPr marL="285750" indent="-285750">
+              <a:buFont typeface="Arial" panose="020B0604020202020204" pitchFamily="34" charset="0"/>
+              <a:buChar char="•"/>
+            </a:pPr>
+            <a:r>
+              <a:rPr lang="en-US" dirty="0"/>
+              <a:t>Sc = Susceptible children population</a:t>
+            </a:r>
+          </a:p>
+          <a:p>
+            <a:pPr marL="285750" indent="-285750">
+              <a:buFont typeface="Arial" panose="020B0604020202020204" pitchFamily="34" charset="0"/>
+              <a:buChar char="•"/>
+            </a:pPr>
+            <a:r>
+              <a:rPr lang="en-US" dirty="0" err="1"/>
+              <a:t>Icc</a:t>
+            </a:r>
+            <a:r>
+              <a:rPr lang="en-US" dirty="0"/>
+              <a:t> = Infectious children via child-child </a:t>
+            </a:r>
+            <a:r>
+              <a:rPr lang="en-US" dirty="0" err="1"/>
+              <a:t>transimission</a:t>
+            </a:r>
+            <a:r>
+              <a:rPr lang="en-US" dirty="0"/>
+              <a:t> pathway</a:t>
+            </a:r>
+          </a:p>
+          <a:p>
+            <a:pPr marL="285750" indent="-285750">
+              <a:buFont typeface="Arial" panose="020B0604020202020204" pitchFamily="34" charset="0"/>
+              <a:buChar char="•"/>
+            </a:pPr>
+            <a:r>
+              <a:rPr lang="en-US" dirty="0" err="1"/>
+              <a:t>Iac</a:t>
+            </a:r>
+            <a:r>
+              <a:rPr lang="en-US" dirty="0"/>
+              <a:t> = Infectious children via adult-child </a:t>
+            </a:r>
+            <a:r>
+              <a:rPr lang="en-US" dirty="0" err="1"/>
+              <a:t>transimission</a:t>
+            </a:r>
+            <a:r>
+              <a:rPr lang="en-US" dirty="0"/>
+              <a:t> pathway</a:t>
+            </a:r>
+          </a:p>
+          <a:p>
+            <a:pPr marL="285750" indent="-285750">
+              <a:buFont typeface="Arial" panose="020B0604020202020204" pitchFamily="34" charset="0"/>
+              <a:buChar char="•"/>
+            </a:pPr>
+            <a:r>
+              <a:rPr lang="en-US" dirty="0" err="1"/>
+              <a:t>Id_c</a:t>
+            </a:r>
+            <a:r>
+              <a:rPr lang="en-US" dirty="0"/>
+              <a:t> = </a:t>
+            </a:r>
+            <a:r>
+              <a:rPr lang="en-US" dirty="0" err="1"/>
+              <a:t>Infectous</a:t>
+            </a:r>
+            <a:r>
+              <a:rPr lang="en-US" dirty="0"/>
+              <a:t> children that has been identified.</a:t>
+            </a:r>
+          </a:p>
+          <a:p>
+            <a:pPr marL="285750" indent="-285750">
+              <a:buFont typeface="Arial" panose="020B0604020202020204" pitchFamily="34" charset="0"/>
+              <a:buChar char="•"/>
+            </a:pPr>
+            <a:r>
+              <a:rPr lang="en-US" dirty="0" err="1"/>
+              <a:t>R_c</a:t>
+            </a:r>
+            <a:r>
+              <a:rPr lang="en-US" dirty="0"/>
+              <a:t> = Recovered children</a:t>
+            </a:r>
+          </a:p>
+          <a:p>
+            <a:pPr marL="285750" indent="-285750">
+              <a:buFont typeface="Arial" panose="020B0604020202020204" pitchFamily="34" charset="0"/>
+              <a:buChar char="•"/>
+            </a:pPr>
+            <a:r>
+              <a:rPr lang="en-US" dirty="0" err="1"/>
+              <a:t>D_c</a:t>
+            </a:r>
+            <a:r>
+              <a:rPr lang="en-US" dirty="0"/>
+              <a:t> = Dead children</a:t>
+            </a:r>
+          </a:p>
+          <a:p>
+            <a:pPr marL="285750" indent="-285750">
+              <a:buFont typeface="Arial" panose="020B0604020202020204" pitchFamily="34" charset="0"/>
+              <a:buChar char="•"/>
+            </a:pPr>
+            <a:r>
+              <a:rPr lang="en-US" dirty="0" err="1"/>
+              <a:t>Beta_cc</a:t>
+            </a:r>
+            <a:r>
+              <a:rPr lang="en-US" dirty="0"/>
+              <a:t> = Transmission rate via child-child </a:t>
+            </a:r>
+            <a:r>
+              <a:rPr lang="en-US" dirty="0" err="1"/>
+              <a:t>transimission</a:t>
+            </a:r>
+            <a:r>
+              <a:rPr lang="en-US" dirty="0"/>
+              <a:t> pathway</a:t>
+            </a:r>
+          </a:p>
+          <a:p>
+            <a:pPr marL="285750" indent="-285750">
+              <a:buFont typeface="Arial" panose="020B0604020202020204" pitchFamily="34" charset="0"/>
+              <a:buChar char="•"/>
+            </a:pPr>
+            <a:r>
+              <a:rPr lang="en-US" dirty="0" err="1"/>
+              <a:t>Beta_ac</a:t>
+            </a:r>
+            <a:r>
+              <a:rPr lang="en-US" dirty="0"/>
+              <a:t> = Transmission rate via adult-child </a:t>
+            </a:r>
+            <a:r>
+              <a:rPr lang="en-US" dirty="0" err="1"/>
+              <a:t>transimission</a:t>
+            </a:r>
+            <a:r>
+              <a:rPr lang="en-US" dirty="0"/>
+              <a:t> pathway</a:t>
+            </a:r>
+          </a:p>
+          <a:p>
+            <a:endParaRPr lang="en-US" dirty="0"/>
           </a:p>
         </p:txBody>
       </p:sp>
@@ -6781,6 +6993,186 @@
               <a:rPr lang="en-US" sz="3500" b="1" u="sng" dirty="0"/>
               <a:t>ADULT POPULATION</a:t>
             </a:r>
+          </a:p>
+        </p:txBody>
+      </p:sp>
+      <p:sp>
+        <p:nvSpPr>
+          <p:cNvPr id="2" name="TextBox 1">
+            <a:extLst>
+              <a:ext uri="{FF2B5EF4-FFF2-40B4-BE49-F238E27FC236}">
+                <a16:creationId xmlns:a16="http://schemas.microsoft.com/office/drawing/2014/main" id="{A0C99D97-E3B2-40BC-BA4E-BF22A1FE6052}"/>
+              </a:ext>
+            </a:extLst>
+          </p:cNvPr>
+          <p:cNvSpPr txBox="1"/>
+          <p:nvPr/>
+        </p:nvSpPr>
+        <p:spPr>
+          <a:xfrm>
+            <a:off x="8662307" y="302079"/>
+            <a:ext cx="3166648" cy="5355312"/>
+          </a:xfrm>
+          <a:prstGeom prst="rect">
+            <a:avLst/>
+          </a:prstGeom>
+          <a:noFill/>
+        </p:spPr>
+        <p:txBody>
+          <a:bodyPr wrap="square" rtlCol="0">
+            <a:spAutoFit/>
+          </a:bodyPr>
+          <a:lstStyle/>
+          <a:p>
+            <a:pPr marL="285750" indent="-285750">
+              <a:buFont typeface="Arial" panose="020B0604020202020204" pitchFamily="34" charset="0"/>
+              <a:buChar char="•"/>
+            </a:pPr>
+            <a:r>
+              <a:rPr lang="en-US" dirty="0"/>
+              <a:t>Sa = Susceptible adult population</a:t>
+            </a:r>
+          </a:p>
+          <a:p>
+            <a:pPr marL="285750" indent="-285750">
+              <a:buFont typeface="Arial" panose="020B0604020202020204" pitchFamily="34" charset="0"/>
+              <a:buChar char="•"/>
+            </a:pPr>
+            <a:r>
+              <a:rPr lang="en-US" dirty="0" err="1"/>
+              <a:t>Iaa</a:t>
+            </a:r>
+            <a:r>
+              <a:rPr lang="en-US" dirty="0"/>
+              <a:t> = Infectious adults via adult-adult </a:t>
+            </a:r>
+            <a:r>
+              <a:rPr lang="en-US" dirty="0" err="1"/>
+              <a:t>transimission</a:t>
+            </a:r>
+            <a:r>
+              <a:rPr lang="en-US" dirty="0"/>
+              <a:t> pathway</a:t>
+            </a:r>
+          </a:p>
+          <a:p>
+            <a:pPr marL="285750" indent="-285750">
+              <a:buFont typeface="Arial" panose="020B0604020202020204" pitchFamily="34" charset="0"/>
+              <a:buChar char="•"/>
+            </a:pPr>
+            <a:r>
+              <a:rPr lang="en-US" dirty="0"/>
+              <a:t>Ica = Infectious adults via child-adult </a:t>
+            </a:r>
+            <a:r>
+              <a:rPr lang="en-US" dirty="0" err="1"/>
+              <a:t>transimission</a:t>
+            </a:r>
+            <a:r>
+              <a:rPr lang="en-US" dirty="0"/>
+              <a:t> pathway</a:t>
+            </a:r>
+          </a:p>
+          <a:p>
+            <a:pPr marL="285750" indent="-285750">
+              <a:buFont typeface="Arial" panose="020B0604020202020204" pitchFamily="34" charset="0"/>
+              <a:buChar char="•"/>
+            </a:pPr>
+            <a:r>
+              <a:rPr lang="en-US" dirty="0" err="1"/>
+              <a:t>Id_a</a:t>
+            </a:r>
+            <a:r>
+              <a:rPr lang="en-US" dirty="0"/>
+              <a:t> = </a:t>
+            </a:r>
+            <a:r>
+              <a:rPr lang="en-US" dirty="0" err="1"/>
+              <a:t>Infectous</a:t>
+            </a:r>
+            <a:r>
+              <a:rPr lang="en-US" dirty="0"/>
+              <a:t> adult that has been identified.</a:t>
+            </a:r>
+          </a:p>
+          <a:p>
+            <a:pPr marL="285750" indent="-285750">
+              <a:buFont typeface="Arial" panose="020B0604020202020204" pitchFamily="34" charset="0"/>
+              <a:buChar char="•"/>
+            </a:pPr>
+            <a:r>
+              <a:rPr lang="en-US" dirty="0" err="1"/>
+              <a:t>R_a</a:t>
+            </a:r>
+            <a:r>
+              <a:rPr lang="en-US" dirty="0"/>
+              <a:t> = Recovered adult</a:t>
+            </a:r>
+          </a:p>
+          <a:p>
+            <a:pPr marL="285750" indent="-285750">
+              <a:buFont typeface="Arial" panose="020B0604020202020204" pitchFamily="34" charset="0"/>
+              <a:buChar char="•"/>
+            </a:pPr>
+            <a:r>
+              <a:rPr lang="en-US" dirty="0" err="1"/>
+              <a:t>D_a</a:t>
+            </a:r>
+            <a:r>
+              <a:rPr lang="en-US" dirty="0"/>
+              <a:t> = Dead adult</a:t>
+            </a:r>
+          </a:p>
+          <a:p>
+            <a:pPr marL="285750" indent="-285750">
+              <a:buFont typeface="Arial" panose="020B0604020202020204" pitchFamily="34" charset="0"/>
+              <a:buChar char="•"/>
+            </a:pPr>
+            <a:r>
+              <a:rPr lang="en-US" dirty="0" err="1"/>
+              <a:t>Beta_aa</a:t>
+            </a:r>
+            <a:r>
+              <a:rPr lang="en-US" dirty="0"/>
+              <a:t> = Transmission rate via adult-adult </a:t>
+            </a:r>
+            <a:r>
+              <a:rPr lang="en-US" dirty="0" err="1"/>
+              <a:t>transimission</a:t>
+            </a:r>
+            <a:r>
+              <a:rPr lang="en-US" dirty="0"/>
+              <a:t> pathway</a:t>
+            </a:r>
+          </a:p>
+          <a:p>
+            <a:pPr marL="285750" indent="-285750">
+              <a:buFont typeface="Arial" panose="020B0604020202020204" pitchFamily="34" charset="0"/>
+              <a:buChar char="•"/>
+            </a:pPr>
+            <a:r>
+              <a:rPr lang="en-US" dirty="0" err="1"/>
+              <a:t>Beta_ca</a:t>
+            </a:r>
+            <a:r>
+              <a:rPr lang="en-US" dirty="0"/>
+              <a:t> = Transmission rate via child-adult </a:t>
+            </a:r>
+            <a:r>
+              <a:rPr lang="en-US" dirty="0" err="1"/>
+              <a:t>transimission</a:t>
+            </a:r>
+            <a:r>
+              <a:rPr lang="en-US" dirty="0"/>
+              <a:t> pathway</a:t>
+            </a:r>
+          </a:p>
+          <a:p>
+            <a:pPr marL="285750" indent="-285750">
+              <a:buFont typeface="Arial" panose="020B0604020202020204" pitchFamily="34" charset="0"/>
+              <a:buChar char="•"/>
+            </a:pPr>
+            <a:endParaRPr lang="en-US" dirty="0"/>
           </a:p>
         </p:txBody>
       </p:sp>

--- a/Model transitions.pptx
+++ b/Model transitions.pptx
@@ -199,7 +199,7 @@
           <a:p>
             <a:fld id="{77A3C82F-5521-4E6C-AB8D-E13B0F6767E4}" type="datetimeFigureOut">
               <a:rPr lang="en-US" smtClean="0"/>
-              <a:t>10/17/2024</a:t>
+              <a:t>10/21/2024</a:t>
             </a:fld>
             <a:endParaRPr lang="en-US"/>
           </a:p>
@@ -843,7 +843,7 @@
           <a:p>
             <a:fld id="{CFB326CB-CCAA-4DCE-95F1-90AB00911D92}" type="datetimeFigureOut">
               <a:rPr lang="en-US" smtClean="0"/>
-              <a:t>10/17/2024</a:t>
+              <a:t>10/21/2024</a:t>
             </a:fld>
             <a:endParaRPr lang="en-US"/>
           </a:p>
@@ -1041,7 +1041,7 @@
           <a:p>
             <a:fld id="{CFB326CB-CCAA-4DCE-95F1-90AB00911D92}" type="datetimeFigureOut">
               <a:rPr lang="en-US" smtClean="0"/>
-              <a:t>10/17/2024</a:t>
+              <a:t>10/21/2024</a:t>
             </a:fld>
             <a:endParaRPr lang="en-US"/>
           </a:p>
@@ -1249,7 +1249,7 @@
           <a:p>
             <a:fld id="{CFB326CB-CCAA-4DCE-95F1-90AB00911D92}" type="datetimeFigureOut">
               <a:rPr lang="en-US" smtClean="0"/>
-              <a:t>10/17/2024</a:t>
+              <a:t>10/21/2024</a:t>
             </a:fld>
             <a:endParaRPr lang="en-US"/>
           </a:p>
@@ -1447,7 +1447,7 @@
           <a:p>
             <a:fld id="{CFB326CB-CCAA-4DCE-95F1-90AB00911D92}" type="datetimeFigureOut">
               <a:rPr lang="en-US" smtClean="0"/>
-              <a:t>10/17/2024</a:t>
+              <a:t>10/21/2024</a:t>
             </a:fld>
             <a:endParaRPr lang="en-US"/>
           </a:p>
@@ -1722,7 +1722,7 @@
           <a:p>
             <a:fld id="{CFB326CB-CCAA-4DCE-95F1-90AB00911D92}" type="datetimeFigureOut">
               <a:rPr lang="en-US" smtClean="0"/>
-              <a:t>10/17/2024</a:t>
+              <a:t>10/21/2024</a:t>
             </a:fld>
             <a:endParaRPr lang="en-US"/>
           </a:p>
@@ -1987,7 +1987,7 @@
           <a:p>
             <a:fld id="{CFB326CB-CCAA-4DCE-95F1-90AB00911D92}" type="datetimeFigureOut">
               <a:rPr lang="en-US" smtClean="0"/>
-              <a:t>10/17/2024</a:t>
+              <a:t>10/21/2024</a:t>
             </a:fld>
             <a:endParaRPr lang="en-US"/>
           </a:p>
@@ -2399,7 +2399,7 @@
           <a:p>
             <a:fld id="{CFB326CB-CCAA-4DCE-95F1-90AB00911D92}" type="datetimeFigureOut">
               <a:rPr lang="en-US" smtClean="0"/>
-              <a:t>10/17/2024</a:t>
+              <a:t>10/21/2024</a:t>
             </a:fld>
             <a:endParaRPr lang="en-US"/>
           </a:p>
@@ -2540,7 +2540,7 @@
           <a:p>
             <a:fld id="{CFB326CB-CCAA-4DCE-95F1-90AB00911D92}" type="datetimeFigureOut">
               <a:rPr lang="en-US" smtClean="0"/>
-              <a:t>10/17/2024</a:t>
+              <a:t>10/21/2024</a:t>
             </a:fld>
             <a:endParaRPr lang="en-US"/>
           </a:p>
@@ -2653,7 +2653,7 @@
           <a:p>
             <a:fld id="{CFB326CB-CCAA-4DCE-95F1-90AB00911D92}" type="datetimeFigureOut">
               <a:rPr lang="en-US" smtClean="0"/>
-              <a:t>10/17/2024</a:t>
+              <a:t>10/21/2024</a:t>
             </a:fld>
             <a:endParaRPr lang="en-US"/>
           </a:p>
@@ -2964,7 +2964,7 @@
           <a:p>
             <a:fld id="{CFB326CB-CCAA-4DCE-95F1-90AB00911D92}" type="datetimeFigureOut">
               <a:rPr lang="en-US" smtClean="0"/>
-              <a:t>10/17/2024</a:t>
+              <a:t>10/21/2024</a:t>
             </a:fld>
             <a:endParaRPr lang="en-US"/>
           </a:p>
@@ -3252,7 +3252,7 @@
           <a:p>
             <a:fld id="{CFB326CB-CCAA-4DCE-95F1-90AB00911D92}" type="datetimeFigureOut">
               <a:rPr lang="en-US" smtClean="0"/>
-              <a:t>10/17/2024</a:t>
+              <a:t>10/21/2024</a:t>
             </a:fld>
             <a:endParaRPr lang="en-US"/>
           </a:p>
@@ -3493,7 +3493,7 @@
           <a:p>
             <a:fld id="{CFB326CB-CCAA-4DCE-95F1-90AB00911D92}" type="datetimeFigureOut">
               <a:rPr lang="en-US" smtClean="0"/>
-              <a:t>10/17/2024</a:t>
+              <a:t>10/21/2024</a:t>
             </a:fld>
             <a:endParaRPr lang="en-US"/>
           </a:p>
@@ -5462,8 +5462,8 @@
         </p:nvSpPr>
         <p:spPr>
           <a:xfrm>
-            <a:off x="9005207" y="130629"/>
-            <a:ext cx="3037114" cy="5355312"/>
+            <a:off x="8973972" y="847725"/>
+            <a:ext cx="3068349" cy="5355312"/>
           </a:xfrm>
           <a:prstGeom prst="rect">
             <a:avLst/>
@@ -7010,8 +7010,8 @@
         </p:nvSpPr>
         <p:spPr>
           <a:xfrm>
-            <a:off x="8662307" y="302079"/>
-            <a:ext cx="3166648" cy="5355312"/>
+            <a:off x="8700931" y="1104899"/>
+            <a:ext cx="3128023" cy="5355312"/>
           </a:xfrm>
           <a:prstGeom prst="rect">
             <a:avLst/>
@@ -7129,8 +7129,16 @@
               <a:buChar char="•"/>
             </a:pPr>
             <a:r>
+              <a:rPr lang="en-US" dirty="0"/>
+              <a:t>b</a:t>
+            </a:r>
+            <a:r>
+              <a:rPr lang="en-US"/>
+              <a:t>eta</a:t>
+            </a:r>
+            <a:r>
               <a:rPr lang="en-US" dirty="0" err="1"/>
-              <a:t>Beta_aa</a:t>
+              <a:t>_aa</a:t>
             </a:r>
             <a:r>
               <a:rPr lang="en-US" dirty="0"/>
@@ -7152,7 +7160,7 @@
             </a:pPr>
             <a:r>
               <a:rPr lang="en-US" dirty="0" err="1"/>
-              <a:t>Beta_ca</a:t>
+              <a:t>beta_ca</a:t>
             </a:r>
             <a:r>
               <a:rPr lang="en-US" dirty="0"/>
